--- a/COMP 3000/Project Docs/Poster v1.pptx
+++ b/COMP 3000/Project Docs/Poster v1.pptx
@@ -206,7 +206,7 @@
           <a:p>
             <a:fld id="{9B25E655-3E9C-4D0B-9B3A-E0503989BECC}" type="datetimeFigureOut">
               <a:rPr lang="en-GB" smtClean="0"/>
-              <a:t>15/03/2026</a:t>
+              <a:t>12/04/2026</a:t>
             </a:fld>
             <a:endParaRPr lang="en-GB"/>
           </a:p>
@@ -696,7 +696,7 @@
           <a:p>
             <a:fld id="{3D48CAC4-BE84-4AD5-A69A-AD6C07B5E002}" type="datetimeFigureOut">
               <a:rPr lang="en-GB" smtClean="0"/>
-              <a:t>15/03/2026</a:t>
+              <a:t>12/04/2026</a:t>
             </a:fld>
             <a:endParaRPr lang="en-GB"/>
           </a:p>
@@ -866,7 +866,7 @@
           <a:p>
             <a:fld id="{3D48CAC4-BE84-4AD5-A69A-AD6C07B5E002}" type="datetimeFigureOut">
               <a:rPr lang="en-GB" smtClean="0"/>
-              <a:t>15/03/2026</a:t>
+              <a:t>12/04/2026</a:t>
             </a:fld>
             <a:endParaRPr lang="en-GB"/>
           </a:p>
@@ -1046,7 +1046,7 @@
           <a:p>
             <a:fld id="{3D48CAC4-BE84-4AD5-A69A-AD6C07B5E002}" type="datetimeFigureOut">
               <a:rPr lang="en-GB" smtClean="0"/>
-              <a:t>15/03/2026</a:t>
+              <a:t>12/04/2026</a:t>
             </a:fld>
             <a:endParaRPr lang="en-GB"/>
           </a:p>
@@ -1216,7 +1216,7 @@
           <a:p>
             <a:fld id="{3D48CAC4-BE84-4AD5-A69A-AD6C07B5E002}" type="datetimeFigureOut">
               <a:rPr lang="en-GB" smtClean="0"/>
-              <a:t>15/03/2026</a:t>
+              <a:t>12/04/2026</a:t>
             </a:fld>
             <a:endParaRPr lang="en-GB"/>
           </a:p>
@@ -1462,7 +1462,7 @@
           <a:p>
             <a:fld id="{3D48CAC4-BE84-4AD5-A69A-AD6C07B5E002}" type="datetimeFigureOut">
               <a:rPr lang="en-GB" smtClean="0"/>
-              <a:t>15/03/2026</a:t>
+              <a:t>12/04/2026</a:t>
             </a:fld>
             <a:endParaRPr lang="en-GB"/>
           </a:p>
@@ -1694,7 +1694,7 @@
           <a:p>
             <a:fld id="{3D48CAC4-BE84-4AD5-A69A-AD6C07B5E002}" type="datetimeFigureOut">
               <a:rPr lang="en-GB" smtClean="0"/>
-              <a:t>15/03/2026</a:t>
+              <a:t>12/04/2026</a:t>
             </a:fld>
             <a:endParaRPr lang="en-GB"/>
           </a:p>
@@ -2061,7 +2061,7 @@
           <a:p>
             <a:fld id="{3D48CAC4-BE84-4AD5-A69A-AD6C07B5E002}" type="datetimeFigureOut">
               <a:rPr lang="en-GB" smtClean="0"/>
-              <a:t>15/03/2026</a:t>
+              <a:t>12/04/2026</a:t>
             </a:fld>
             <a:endParaRPr lang="en-GB"/>
           </a:p>
@@ -2179,7 +2179,7 @@
           <a:p>
             <a:fld id="{3D48CAC4-BE84-4AD5-A69A-AD6C07B5E002}" type="datetimeFigureOut">
               <a:rPr lang="en-GB" smtClean="0"/>
-              <a:t>15/03/2026</a:t>
+              <a:t>12/04/2026</a:t>
             </a:fld>
             <a:endParaRPr lang="en-GB"/>
           </a:p>
@@ -2274,7 +2274,7 @@
           <a:p>
             <a:fld id="{3D48CAC4-BE84-4AD5-A69A-AD6C07B5E002}" type="datetimeFigureOut">
               <a:rPr lang="en-GB" smtClean="0"/>
-              <a:t>15/03/2026</a:t>
+              <a:t>12/04/2026</a:t>
             </a:fld>
             <a:endParaRPr lang="en-GB"/>
           </a:p>
@@ -2551,7 +2551,7 @@
           <a:p>
             <a:fld id="{3D48CAC4-BE84-4AD5-A69A-AD6C07B5E002}" type="datetimeFigureOut">
               <a:rPr lang="en-GB" smtClean="0"/>
-              <a:t>15/03/2026</a:t>
+              <a:t>12/04/2026</a:t>
             </a:fld>
             <a:endParaRPr lang="en-GB"/>
           </a:p>
@@ -2808,7 +2808,7 @@
           <a:p>
             <a:fld id="{3D48CAC4-BE84-4AD5-A69A-AD6C07B5E002}" type="datetimeFigureOut">
               <a:rPr lang="en-GB" smtClean="0"/>
-              <a:t>15/03/2026</a:t>
+              <a:t>12/04/2026</a:t>
             </a:fld>
             <a:endParaRPr lang="en-GB"/>
           </a:p>
@@ -3021,7 +3021,7 @@
           <a:p>
             <a:fld id="{3D48CAC4-BE84-4AD5-A69A-AD6C07B5E002}" type="datetimeFigureOut">
               <a:rPr lang="en-GB" smtClean="0"/>
-              <a:t>15/03/2026</a:t>
+              <a:t>12/04/2026</a:t>
             </a:fld>
             <a:endParaRPr lang="en-GB"/>
           </a:p>
@@ -3412,37 +3412,6 @@
 <file path=ppt/slides/slide1.xml><?xml version="1.0" encoding="utf-8"?>
 <p:sld xmlns:a="http://schemas.openxmlformats.org/drawingml/2006/main" xmlns:r="http://schemas.openxmlformats.org/officeDocument/2006/relationships" xmlns:p="http://schemas.openxmlformats.org/presentationml/2006/main">
   <p:cSld>
-    <p:bg>
-      <p:bgPr>
-        <a:gradFill>
-          <a:gsLst>
-            <a:gs pos="0">
-              <a:schemeClr val="accent1">
-                <a:lumMod val="5000"/>
-                <a:lumOff val="95000"/>
-              </a:schemeClr>
-            </a:gs>
-            <a:gs pos="33000">
-              <a:schemeClr val="accent1">
-                <a:lumMod val="45000"/>
-                <a:lumOff val="55000"/>
-              </a:schemeClr>
-            </a:gs>
-            <a:gs pos="73000">
-              <a:schemeClr val="accent1">
-                <a:lumMod val="45000"/>
-                <a:lumOff val="55000"/>
-              </a:schemeClr>
-            </a:gs>
-            <a:gs pos="100000">
-              <a:srgbClr val="4CB3E6"/>
-            </a:gs>
-          </a:gsLst>
-          <a:lin ang="5400000" scaled="1"/>
-        </a:gradFill>
-        <a:effectLst/>
-      </p:bgPr>
-    </p:bg>
     <p:spTree>
       <p:nvGrpSpPr>
         <p:cNvPr id="1" name=""/>
@@ -3477,21 +3446,9 @@
           <a:prstGeom prst="rect">
             <a:avLst/>
           </a:prstGeom>
-          <a:gradFill flip="none" rotWithShape="1">
-            <a:gsLst>
-              <a:gs pos="50000">
-                <a:srgbClr val="E8FABC"/>
-              </a:gs>
-              <a:gs pos="0">
-                <a:srgbClr val="40C9DC"/>
-              </a:gs>
-              <a:gs pos="100000">
-                <a:srgbClr val="002060"/>
-              </a:gs>
-            </a:gsLst>
-            <a:lin ang="5400000" scaled="1"/>
-            <a:tileRect/>
-          </a:gradFill>
+          <a:solidFill>
+            <a:srgbClr val="0B6F97"/>
+          </a:solidFill>
           <a:ln>
             <a:noFill/>
           </a:ln>
@@ -3541,21 +3498,9 @@
           <a:prstGeom prst="rect">
             <a:avLst/>
           </a:prstGeom>
-          <a:gradFill flip="none" rotWithShape="1">
-            <a:gsLst>
-              <a:gs pos="0">
-                <a:srgbClr val="40C9DC"/>
-              </a:gs>
-              <a:gs pos="50000">
-                <a:srgbClr val="E8FABC"/>
-              </a:gs>
-              <a:gs pos="100000">
-                <a:srgbClr val="002060"/>
-              </a:gs>
-            </a:gsLst>
-            <a:lin ang="5400000" scaled="1"/>
-            <a:tileRect/>
-          </a:gradFill>
+          <a:solidFill>
+            <a:srgbClr val="0B6F97"/>
+          </a:solidFill>
           <a:ln>
             <a:noFill/>
           </a:ln>
@@ -3726,6 +3671,9 @@
           <a:prstGeom prst="rect">
             <a:avLst/>
           </a:prstGeom>
+          <a:solidFill>
+            <a:srgbClr val="0070C0"/>
+          </a:solidFill>
         </p:spPr>
         <p:style>
           <a:lnRef idx="2">
@@ -6098,7 +6046,7 @@
             <a:prstGeom prst="rect">
               <a:avLst/>
             </a:prstGeom>
-            <a:grpFill/>
+            <a:noFill/>
           </p:spPr>
           <p:txBody>
             <a:bodyPr wrap="square" rtlCol="0">
@@ -6112,7 +6060,7 @@
                     <a:schemeClr val="bg1"/>
                   </a:solidFill>
                 </a:rPr>
-                <a:t>User Feedback UI</a:t>
+                <a:t>User Returned UI</a:t>
               </a:r>
             </a:p>
           </p:txBody>
@@ -6887,10 +6835,10 @@
       </p:cxnSp>
       <p:grpSp>
         <p:nvGrpSpPr>
-          <p:cNvPr id="8" name="Group 7">
+          <p:cNvPr id="127" name="Group 126">
             <a:extLst>
               <a:ext uri="{FF2B5EF4-FFF2-40B4-BE49-F238E27FC236}">
-                <a16:creationId xmlns:a16="http://schemas.microsoft.com/office/drawing/2014/main" id="{C0C05E5E-99C1-C717-FD52-FE16A2691E43}"/>
+                <a16:creationId xmlns:a16="http://schemas.microsoft.com/office/drawing/2014/main" id="{39A813B8-5F11-6D53-A572-65C04FFC0AEC}"/>
               </a:ext>
             </a:extLst>
           </p:cNvPr>
@@ -6899,202 +6847,21 @@
         </p:nvGrpSpPr>
         <p:grpSpPr>
           <a:xfrm>
-            <a:off x="20739611" y="1710307"/>
-            <a:ext cx="8976030" cy="7143676"/>
-            <a:chOff x="19813562" y="1072272"/>
-            <a:chExt cx="8976030" cy="7143676"/>
-          </a:xfrm>
+            <a:off x="20769835" y="1710308"/>
+            <a:ext cx="8945806" cy="4557800"/>
+            <a:chOff x="7457096" y="257175"/>
+            <a:chExt cx="3315680" cy="2054225"/>
+          </a:xfrm>
+          <a:solidFill>
+            <a:srgbClr val="78206E"/>
+          </a:solidFill>
         </p:grpSpPr>
-        <p:grpSp>
-          <p:nvGrpSpPr>
-            <p:cNvPr id="127" name="Group 126">
+        <p:sp>
+          <p:nvSpPr>
+            <p:cNvPr id="124" name="Rectangle 123">
               <a:extLst>
                 <a:ext uri="{FF2B5EF4-FFF2-40B4-BE49-F238E27FC236}">
-                  <a16:creationId xmlns:a16="http://schemas.microsoft.com/office/drawing/2014/main" id="{39A813B8-5F11-6D53-A572-65C04FFC0AEC}"/>
-                </a:ext>
-              </a:extLst>
-            </p:cNvPr>
-            <p:cNvGrpSpPr/>
-            <p:nvPr/>
-          </p:nvGrpSpPr>
-          <p:grpSpPr>
-            <a:xfrm>
-              <a:off x="19843786" y="1072273"/>
-              <a:ext cx="8945806" cy="4557800"/>
-              <a:chOff x="7457096" y="257175"/>
-              <a:chExt cx="3315680" cy="2054225"/>
-            </a:xfrm>
-            <a:solidFill>
-              <a:schemeClr val="accent1">
-                <a:lumMod val="75000"/>
-              </a:schemeClr>
-            </a:solidFill>
-          </p:grpSpPr>
-          <p:sp>
-            <p:nvSpPr>
-              <p:cNvPr id="124" name="Rectangle 123">
-                <a:extLst>
-                  <a:ext uri="{FF2B5EF4-FFF2-40B4-BE49-F238E27FC236}">
-                    <a16:creationId xmlns:a16="http://schemas.microsoft.com/office/drawing/2014/main" id="{B323E9C1-097C-7F24-82AB-1D29B9A44372}"/>
-                  </a:ext>
-                </a:extLst>
-              </p:cNvPr>
-              <p:cNvSpPr/>
-              <p:nvPr/>
-            </p:nvSpPr>
-            <p:spPr>
-              <a:xfrm>
-                <a:off x="7457096" y="257175"/>
-                <a:ext cx="3315680" cy="2054225"/>
-              </a:xfrm>
-              <a:prstGeom prst="rect">
-                <a:avLst/>
-              </a:prstGeom>
-              <a:grpFill/>
-              <a:ln>
-                <a:solidFill>
-                  <a:schemeClr val="accent1">
-                    <a:lumMod val="40000"/>
-                    <a:lumOff val="60000"/>
-                  </a:schemeClr>
-                </a:solidFill>
-              </a:ln>
-            </p:spPr>
-            <p:style>
-              <a:lnRef idx="2">
-                <a:schemeClr val="accent1">
-                  <a:shade val="15000"/>
-                </a:schemeClr>
-              </a:lnRef>
-              <a:fillRef idx="1">
-                <a:schemeClr val="accent1"/>
-              </a:fillRef>
-              <a:effectRef idx="0">
-                <a:schemeClr val="accent1"/>
-              </a:effectRef>
-              <a:fontRef idx="minor">
-                <a:schemeClr val="lt1"/>
-              </a:fontRef>
-            </p:style>
-            <p:txBody>
-              <a:bodyPr rtlCol="0" anchor="ctr"/>
-              <a:lstStyle/>
-              <a:p>
-                <a:pPr algn="ctr"/>
-                <a:endParaRPr lang="en-GB"/>
-              </a:p>
-            </p:txBody>
-          </p:sp>
-          <p:grpSp>
-            <p:nvGrpSpPr>
-              <p:cNvPr id="126" name="Group 125">
-                <a:extLst>
-                  <a:ext uri="{FF2B5EF4-FFF2-40B4-BE49-F238E27FC236}">
-                    <a16:creationId xmlns:a16="http://schemas.microsoft.com/office/drawing/2014/main" id="{69727010-BEAE-97BF-5264-C768C78BDD70}"/>
-                  </a:ext>
-                </a:extLst>
-              </p:cNvPr>
-              <p:cNvGrpSpPr/>
-              <p:nvPr/>
-            </p:nvGrpSpPr>
-            <p:grpSpPr>
-              <a:xfrm>
-                <a:off x="7510228" y="380542"/>
-                <a:ext cx="3189031" cy="1839611"/>
-                <a:chOff x="7510228" y="380542"/>
-                <a:chExt cx="3189031" cy="1839611"/>
-              </a:xfrm>
-              <a:grpFill/>
-            </p:grpSpPr>
-            <p:pic>
-              <p:nvPicPr>
-                <p:cNvPr id="123" name="Picture 122">
-                  <a:extLst>
-                    <a:ext uri="{FF2B5EF4-FFF2-40B4-BE49-F238E27FC236}">
-                      <a16:creationId xmlns:a16="http://schemas.microsoft.com/office/drawing/2014/main" id="{54361CC6-C7B6-7DDD-959E-2FDDF451803C}"/>
-                    </a:ext>
-                  </a:extLst>
-                </p:cNvPr>
-                <p:cNvPicPr>
-                  <a:picLocks noChangeAspect="1"/>
-                </p:cNvPicPr>
-                <p:nvPr/>
-              </p:nvPicPr>
-              <p:blipFill>
-                <a:blip r:embed="rId6"/>
-                <a:stretch>
-                  <a:fillRect/>
-                </a:stretch>
-              </p:blipFill>
-              <p:spPr>
-                <a:xfrm>
-                  <a:off x="7530612" y="380542"/>
-                  <a:ext cx="3168647" cy="1637058"/>
-                </a:xfrm>
-                <a:prstGeom prst="rect">
-                  <a:avLst/>
-                </a:prstGeom>
-                <a:grpFill/>
-                <a:ln>
-                  <a:solidFill>
-                    <a:schemeClr val="accent1">
-                      <a:lumMod val="40000"/>
-                      <a:lumOff val="60000"/>
-                    </a:schemeClr>
-                  </a:solidFill>
-                </a:ln>
-              </p:spPr>
-            </p:pic>
-            <p:sp>
-              <p:nvSpPr>
-                <p:cNvPr id="125" name="TextBox 124">
-                  <a:extLst>
-                    <a:ext uri="{FF2B5EF4-FFF2-40B4-BE49-F238E27FC236}">
-                      <a16:creationId xmlns:a16="http://schemas.microsoft.com/office/drawing/2014/main" id="{3B4DE68B-5288-4443-8A72-E9C43A4EC4A4}"/>
-                    </a:ext>
-                  </a:extLst>
-                </p:cNvPr>
-                <p:cNvSpPr txBox="1"/>
-                <p:nvPr/>
-              </p:nvSpPr>
-              <p:spPr>
-                <a:xfrm>
-                  <a:off x="7510228" y="2012078"/>
-                  <a:ext cx="3009901" cy="208075"/>
-                </a:xfrm>
-                <a:prstGeom prst="rect">
-                  <a:avLst/>
-                </a:prstGeom>
-                <a:grpFill/>
-                <a:ln>
-                  <a:noFill/>
-                </a:ln>
-              </p:spPr>
-              <p:txBody>
-                <a:bodyPr wrap="square" rtlCol="0">
-                  <a:spAutoFit/>
-                </a:bodyPr>
-                <a:lstStyle/>
-                <a:p>
-                  <a:r>
-                    <a:rPr lang="en-GB" sz="2400" dirty="0">
-                      <a:solidFill>
-                        <a:schemeClr val="bg1"/>
-                      </a:solidFill>
-                    </a:rPr>
-                    <a:t>- CSBS 2019-2025 (Phishing attacks)</a:t>
-                  </a:r>
-                </a:p>
-              </p:txBody>
-            </p:sp>
-          </p:grpSp>
-        </p:grpSp>
-        <p:sp>
-          <p:nvSpPr>
-            <p:cNvPr id="1024" name="Rectangle 1023">
-              <a:extLst>
-                <a:ext uri="{FF2B5EF4-FFF2-40B4-BE49-F238E27FC236}">
-                  <a16:creationId xmlns:a16="http://schemas.microsoft.com/office/drawing/2014/main" id="{E75A96B6-F054-56E7-D8EE-5276A7700385}"/>
+                  <a16:creationId xmlns:a16="http://schemas.microsoft.com/office/drawing/2014/main" id="{B323E9C1-097C-7F24-82AB-1D29B9A44372}"/>
                 </a:ext>
               </a:extLst>
             </p:cNvPr>
@@ -7103,259 +6870,16 @@
           </p:nvSpPr>
           <p:spPr>
             <a:xfrm>
-              <a:off x="19872650" y="5809792"/>
-              <a:ext cx="2701600" cy="1502140"/>
+              <a:off x="7457096" y="257175"/>
+              <a:ext cx="3315680" cy="2054225"/>
             </a:xfrm>
             <a:prstGeom prst="rect">
               <a:avLst/>
             </a:prstGeom>
-            <a:noFill/>
+            <a:grpFill/>
             <a:ln>
               <a:solidFill>
-                <a:srgbClr val="FF0000"/>
-              </a:solidFill>
-            </a:ln>
-          </p:spPr>
-          <p:style>
-            <a:lnRef idx="2">
-              <a:schemeClr val="accent1">
-                <a:shade val="15000"/>
-              </a:schemeClr>
-            </a:lnRef>
-            <a:fillRef idx="1">
-              <a:schemeClr val="accent1"/>
-            </a:fillRef>
-            <a:effectRef idx="0">
-              <a:schemeClr val="accent1"/>
-            </a:effectRef>
-            <a:fontRef idx="minor">
-              <a:schemeClr val="lt1"/>
-            </a:fontRef>
-          </p:style>
-          <p:txBody>
-            <a:bodyPr rtlCol="0" anchor="ctr"/>
-            <a:lstStyle/>
-            <a:p>
-              <a:pPr algn="ctr"/>
-              <a:r>
-                <a:rPr lang="en-GB" sz="3200" dirty="0">
-                  <a:solidFill>
-                    <a:schemeClr val="tx1"/>
-                  </a:solidFill>
-                </a:rPr>
-                <a:t>Most Targeted</a:t>
-              </a:r>
-            </a:p>
-            <a:p>
-              <a:pPr algn="ctr"/>
-              <a:r>
-                <a:rPr lang="en-GB" sz="3200" dirty="0">
-                  <a:solidFill>
-                    <a:schemeClr val="tx1"/>
-                  </a:solidFill>
-                </a:rPr>
-                <a:t>Ages 21-35</a:t>
-              </a:r>
-            </a:p>
-          </p:txBody>
-        </p:sp>
-        <p:pic>
-          <p:nvPicPr>
-            <p:cNvPr id="1028" name="Picture 4" descr="Target PNG transparent image download, size: 576x576px">
-              <a:extLst>
-                <a:ext uri="{FF2B5EF4-FFF2-40B4-BE49-F238E27FC236}">
-                  <a16:creationId xmlns:a16="http://schemas.microsoft.com/office/drawing/2014/main" id="{50401D76-0120-227F-41A0-7F5BA66DA55B}"/>
-                </a:ext>
-              </a:extLst>
-            </p:cNvPr>
-            <p:cNvPicPr>
-              <a:picLocks noChangeAspect="1" noChangeArrowheads="1"/>
-            </p:cNvPicPr>
-            <p:nvPr/>
-          </p:nvPicPr>
-          <p:blipFill>
-            <a:blip r:embed="rId7">
-              <a:alphaModFix amt="46000"/>
-              <a:extLst>
-                <a:ext uri="{28A0092B-C50C-407E-A947-70E740481C1C}">
-                  <a14:useLocalDpi xmlns:a14="http://schemas.microsoft.com/office/drawing/2010/main" val="0"/>
-                </a:ext>
-              </a:extLst>
-            </a:blip>
-            <a:srcRect/>
-            <a:stretch>
-              <a:fillRect/>
-            </a:stretch>
-          </p:blipFill>
-          <p:spPr bwMode="auto">
-            <a:xfrm>
-              <a:off x="20130917" y="5365431"/>
-              <a:ext cx="2302643" cy="2302643"/>
-            </a:xfrm>
-            <a:prstGeom prst="rect">
-              <a:avLst/>
-            </a:prstGeom>
-            <a:noFill/>
-            <a:effectLst>
-              <a:outerShdw blurRad="50800" dist="50800" dir="5400000" algn="ctr" rotWithShape="0">
-                <a:srgbClr val="000000">
-                  <a:alpha val="0"/>
-                </a:srgbClr>
-              </a:outerShdw>
-            </a:effectLst>
-            <a:extLst>
-              <a:ext uri="{909E8E84-426E-40DD-AFC4-6F175D3DCCD1}">
-                <a14:hiddenFill xmlns:a14="http://schemas.microsoft.com/office/drawing/2010/main">
-                  <a:solidFill>
-                    <a:srgbClr val="FFFFFF"/>
-                  </a:solidFill>
-                </a14:hiddenFill>
-              </a:ext>
-            </a:extLst>
-          </p:spPr>
-        </p:pic>
-        <p:sp>
-          <p:nvSpPr>
-            <p:cNvPr id="1027" name="Rectangle 1026">
-              <a:extLst>
-                <a:ext uri="{FF2B5EF4-FFF2-40B4-BE49-F238E27FC236}">
-                  <a16:creationId xmlns:a16="http://schemas.microsoft.com/office/drawing/2014/main" id="{021A4DB6-F017-B5ED-3703-2D9B3B1F0F17}"/>
-                </a:ext>
-              </a:extLst>
-            </p:cNvPr>
-            <p:cNvSpPr/>
-            <p:nvPr/>
-          </p:nvSpPr>
-          <p:spPr>
-            <a:xfrm>
-              <a:off x="22955460" y="5753157"/>
-              <a:ext cx="2701599" cy="1591370"/>
-            </a:xfrm>
-            <a:prstGeom prst="rect">
-              <a:avLst/>
-            </a:prstGeom>
-            <a:noFill/>
-            <a:ln>
-              <a:solidFill>
-                <a:srgbClr val="FFFF00"/>
-              </a:solidFill>
-            </a:ln>
-          </p:spPr>
-          <p:style>
-            <a:lnRef idx="2">
-              <a:schemeClr val="accent1">
-                <a:shade val="15000"/>
-              </a:schemeClr>
-            </a:lnRef>
-            <a:fillRef idx="1">
-              <a:schemeClr val="accent1"/>
-            </a:fillRef>
-            <a:effectRef idx="0">
-              <a:schemeClr val="accent1"/>
-            </a:effectRef>
-            <a:fontRef idx="minor">
-              <a:schemeClr val="lt1"/>
-            </a:fontRef>
-          </p:style>
-          <p:txBody>
-            <a:bodyPr rtlCol="0" anchor="ctr"/>
-            <a:lstStyle/>
-            <a:p>
-              <a:pPr algn="ctr"/>
-              <a:r>
-                <a:rPr lang="en-GB" sz="3200" dirty="0">
-                  <a:solidFill>
-                    <a:schemeClr val="tx1"/>
-                  </a:solidFill>
-                </a:rPr>
-                <a:t>Most Gullible</a:t>
-              </a:r>
-            </a:p>
-            <a:p>
-              <a:pPr algn="ctr"/>
-              <a:r>
-                <a:rPr lang="en-GB" sz="3200" dirty="0">
-                  <a:solidFill>
-                    <a:schemeClr val="tx1"/>
-                  </a:solidFill>
-                </a:rPr>
-                <a:t>Ages 35-49</a:t>
-              </a:r>
-            </a:p>
-          </p:txBody>
-        </p:sp>
-        <p:pic>
-          <p:nvPicPr>
-            <p:cNvPr id="1030" name="Picture 6" descr="Free Phishing Attack Icon - Download SVG, PNG for Crime &amp; Security |  IconScout">
-              <a:extLst>
-                <a:ext uri="{FF2B5EF4-FFF2-40B4-BE49-F238E27FC236}">
-                  <a16:creationId xmlns:a16="http://schemas.microsoft.com/office/drawing/2014/main" id="{01462B03-6E38-B30C-535F-74D3971AC8E4}"/>
-                </a:ext>
-              </a:extLst>
-            </p:cNvPr>
-            <p:cNvPicPr>
-              <a:picLocks noChangeAspect="1" noChangeArrowheads="1"/>
-            </p:cNvPicPr>
-            <p:nvPr/>
-          </p:nvPicPr>
-          <p:blipFill>
-            <a:blip r:embed="rId8">
-              <a:alphaModFix amt="40000"/>
-              <a:extLst>
-                <a:ext uri="{28A0092B-C50C-407E-A947-70E740481C1C}">
-                  <a14:useLocalDpi xmlns:a14="http://schemas.microsoft.com/office/drawing/2010/main" val="0"/>
-                </a:ext>
-              </a:extLst>
-            </a:blip>
-            <a:srcRect/>
-            <a:stretch>
-              <a:fillRect/>
-            </a:stretch>
-          </p:blipFill>
-          <p:spPr bwMode="auto">
-            <a:xfrm>
-              <a:off x="23190228" y="5545055"/>
-              <a:ext cx="1909698" cy="1909698"/>
-            </a:xfrm>
-            <a:prstGeom prst="rect">
-              <a:avLst/>
-            </a:prstGeom>
-            <a:noFill/>
-            <a:extLst>
-              <a:ext uri="{909E8E84-426E-40DD-AFC4-6F175D3DCCD1}">
-                <a14:hiddenFill xmlns:a14="http://schemas.microsoft.com/office/drawing/2010/main">
-                  <a:solidFill>
-                    <a:srgbClr val="FFFFFF"/>
-                  </a:solidFill>
-                </a14:hiddenFill>
-              </a:ext>
-            </a:extLst>
-          </p:spPr>
-        </p:pic>
-        <p:sp>
-          <p:nvSpPr>
-            <p:cNvPr id="1029" name="Rectangle 1028">
-              <a:extLst>
-                <a:ext uri="{FF2B5EF4-FFF2-40B4-BE49-F238E27FC236}">
-                  <a16:creationId xmlns:a16="http://schemas.microsoft.com/office/drawing/2014/main" id="{71738483-8CAA-1A99-C318-39B8CC162B0E}"/>
-                </a:ext>
-              </a:extLst>
-            </p:cNvPr>
-            <p:cNvSpPr/>
-            <p:nvPr/>
-          </p:nvSpPr>
-          <p:spPr>
-            <a:xfrm>
-              <a:off x="26025047" y="5781969"/>
-              <a:ext cx="2764545" cy="1591370"/>
-            </a:xfrm>
-            <a:prstGeom prst="rect">
-              <a:avLst/>
-            </a:prstGeom>
-            <a:noFill/>
-            <a:ln>
-              <a:solidFill>
-                <a:schemeClr val="accent6">
+                <a:schemeClr val="accent1">
                   <a:lumMod val="40000"/>
                   <a:lumOff val="60000"/>
                 </a:schemeClr>
@@ -7383,204 +6907,16 @@
             <a:lstStyle/>
             <a:p>
               <a:pPr algn="ctr"/>
-              <a:r>
-                <a:rPr lang="en-GB" sz="3200" dirty="0">
-                  <a:solidFill>
-                    <a:schemeClr val="tx1"/>
-                  </a:solidFill>
-                </a:rPr>
-                <a:t>Most Financial Losses</a:t>
-              </a:r>
-            </a:p>
-            <a:p>
-              <a:pPr algn="ctr"/>
-              <a:r>
-                <a:rPr lang="en-GB" sz="3200" dirty="0">
-                  <a:solidFill>
-                    <a:schemeClr val="tx1"/>
-                  </a:solidFill>
-                </a:rPr>
-                <a:t>Ages 75+</a:t>
-              </a:r>
-            </a:p>
-          </p:txBody>
-        </p:sp>
-        <p:pic>
-          <p:nvPicPr>
-            <p:cNvPr id="1032" name="Picture 8" descr="Money bag with hole 35774809 PNG">
-              <a:extLst>
-                <a:ext uri="{FF2B5EF4-FFF2-40B4-BE49-F238E27FC236}">
-                  <a16:creationId xmlns:a16="http://schemas.microsoft.com/office/drawing/2014/main" id="{36A55BC7-ADAD-C034-5D3C-2F902F24FC9B}"/>
-                </a:ext>
-              </a:extLst>
-            </p:cNvPr>
-            <p:cNvPicPr>
-              <a:picLocks noChangeAspect="1" noChangeArrowheads="1"/>
-            </p:cNvPicPr>
-            <p:nvPr/>
-          </p:nvPicPr>
-          <p:blipFill rotWithShape="1">
-            <a:blip r:embed="rId9">
-              <a:alphaModFix amt="36000"/>
-              <a:extLst>
-                <a:ext uri="{28A0092B-C50C-407E-A947-70E740481C1C}">
-                  <a14:useLocalDpi xmlns:a14="http://schemas.microsoft.com/office/drawing/2010/main" val="0"/>
-                </a:ext>
-              </a:extLst>
-            </a:blip>
-            <a:srcRect b="30716"/>
-            <a:stretch>
-              <a:fillRect/>
-            </a:stretch>
-          </p:blipFill>
-          <p:spPr bwMode="auto">
-            <a:xfrm>
-              <a:off x="26353162" y="5684191"/>
-              <a:ext cx="2108314" cy="2103899"/>
-            </a:xfrm>
-            <a:prstGeom prst="rect">
-              <a:avLst/>
-            </a:prstGeom>
-            <a:noFill/>
-            <a:extLst>
-              <a:ext uri="{909E8E84-426E-40DD-AFC4-6F175D3DCCD1}">
-                <a14:hiddenFill xmlns:a14="http://schemas.microsoft.com/office/drawing/2010/main">
-                  <a:solidFill>
-                    <a:srgbClr val="FFFFFF"/>
-                  </a:solidFill>
-                </a14:hiddenFill>
-              </a:ext>
-            </a:extLst>
-          </p:spPr>
-        </p:pic>
-        <p:sp>
-          <p:nvSpPr>
-            <p:cNvPr id="1036" name="Rectangle 1035">
-              <a:extLst>
-                <a:ext uri="{FF2B5EF4-FFF2-40B4-BE49-F238E27FC236}">
-                  <a16:creationId xmlns:a16="http://schemas.microsoft.com/office/drawing/2014/main" id="{8577361A-E43E-2D25-A0C1-CB77FA47B13A}"/>
-                </a:ext>
-              </a:extLst>
-            </p:cNvPr>
-            <p:cNvSpPr/>
-            <p:nvPr/>
-          </p:nvSpPr>
-          <p:spPr>
-            <a:xfrm>
-              <a:off x="19813562" y="7657207"/>
-              <a:ext cx="8976030" cy="540713"/>
-            </a:xfrm>
-            <a:prstGeom prst="rect">
-              <a:avLst/>
-            </a:prstGeom>
-            <a:solidFill>
-              <a:schemeClr val="accent1">
-                <a:lumMod val="75000"/>
-              </a:schemeClr>
-            </a:solidFill>
-          </p:spPr>
-          <p:style>
-            <a:lnRef idx="2">
-              <a:schemeClr val="accent1">
-                <a:shade val="15000"/>
-              </a:schemeClr>
-            </a:lnRef>
-            <a:fillRef idx="1">
-              <a:schemeClr val="accent1"/>
-            </a:fillRef>
-            <a:effectRef idx="0">
-              <a:schemeClr val="accent1"/>
-            </a:effectRef>
-            <a:fontRef idx="minor">
-              <a:schemeClr val="lt1"/>
-            </a:fontRef>
-          </p:style>
-          <p:txBody>
-            <a:bodyPr rtlCol="0" anchor="ctr"/>
-            <a:lstStyle/>
-            <a:p>
-              <a:pPr algn="ctr"/>
-              <a:r>
-                <a:rPr lang="en-GB" sz="2400" dirty="0"/>
-                <a:t>Data from LexisNexis.co.uk &amp; Ons.gov.uk</a:t>
-              </a:r>
-            </a:p>
-          </p:txBody>
-        </p:sp>
-        <p:sp>
-          <p:nvSpPr>
-            <p:cNvPr id="6" name="Rectangle 5">
-              <a:extLst>
-                <a:ext uri="{FF2B5EF4-FFF2-40B4-BE49-F238E27FC236}">
-                  <a16:creationId xmlns:a16="http://schemas.microsoft.com/office/drawing/2014/main" id="{075F6BDE-AB73-715A-8CAA-05E59A82C86B}"/>
-                </a:ext>
-              </a:extLst>
-            </p:cNvPr>
-            <p:cNvSpPr/>
-            <p:nvPr/>
-          </p:nvSpPr>
-          <p:spPr>
-            <a:xfrm>
-              <a:off x="19843785" y="1072272"/>
-              <a:ext cx="8945807" cy="7143676"/>
-            </a:xfrm>
-            <a:prstGeom prst="rect">
-              <a:avLst/>
-            </a:prstGeom>
-            <a:noFill/>
-          </p:spPr>
-          <p:style>
-            <a:lnRef idx="2">
-              <a:schemeClr val="accent1">
-                <a:shade val="15000"/>
-              </a:schemeClr>
-            </a:lnRef>
-            <a:fillRef idx="1">
-              <a:schemeClr val="accent1"/>
-            </a:fillRef>
-            <a:effectRef idx="0">
-              <a:schemeClr val="accent1"/>
-            </a:effectRef>
-            <a:fontRef idx="minor">
-              <a:schemeClr val="lt1"/>
-            </a:fontRef>
-          </p:style>
-          <p:txBody>
-            <a:bodyPr rtlCol="0" anchor="ctr"/>
-            <a:lstStyle/>
-            <a:p>
-              <a:pPr algn="ctr"/>
               <a:endParaRPr lang="en-GB"/>
             </a:p>
           </p:txBody>
         </p:sp>
-      </p:grpSp>
-      <p:grpSp>
-        <p:nvGrpSpPr>
-          <p:cNvPr id="43" name="Group 42">
-            <a:extLst>
-              <a:ext uri="{FF2B5EF4-FFF2-40B4-BE49-F238E27FC236}">
-                <a16:creationId xmlns:a16="http://schemas.microsoft.com/office/drawing/2014/main" id="{4045BC30-3BBC-9A36-30BE-A3D93AD377AC}"/>
-              </a:ext>
-            </a:extLst>
-          </p:cNvPr>
-          <p:cNvGrpSpPr/>
-          <p:nvPr/>
-        </p:nvGrpSpPr>
-        <p:grpSpPr>
-          <a:xfrm>
-            <a:off x="19059963" y="18287833"/>
-            <a:ext cx="12142398" cy="4316852"/>
-            <a:chOff x="19059963" y="18287833"/>
-            <a:chExt cx="12142398" cy="4316852"/>
-          </a:xfrm>
-        </p:grpSpPr>
         <p:grpSp>
           <p:nvGrpSpPr>
-            <p:cNvPr id="41" name="Group 40">
+            <p:cNvPr id="126" name="Group 125">
               <a:extLst>
                 <a:ext uri="{FF2B5EF4-FFF2-40B4-BE49-F238E27FC236}">
-                  <a16:creationId xmlns:a16="http://schemas.microsoft.com/office/drawing/2014/main" id="{ABB0EBDA-468B-8D03-D601-CE63FAC44A75}"/>
+                  <a16:creationId xmlns:a16="http://schemas.microsoft.com/office/drawing/2014/main" id="{69727010-BEAE-97BF-5264-C768C78BDD70}"/>
                 </a:ext>
               </a:extLst>
             </p:cNvPr>
@@ -7589,165 +6925,698 @@
           </p:nvGrpSpPr>
           <p:grpSpPr>
             <a:xfrm>
-              <a:off x="19059963" y="18287833"/>
-              <a:ext cx="11237475" cy="4316852"/>
-              <a:chOff x="19059963" y="18287833"/>
-              <a:chExt cx="11237475" cy="4316852"/>
+              <a:off x="7510228" y="380542"/>
+              <a:ext cx="3189031" cy="1839611"/>
+              <a:chOff x="7510228" y="380542"/>
+              <a:chExt cx="3189031" cy="1839611"/>
             </a:xfrm>
+            <a:grpFill/>
           </p:grpSpPr>
-          <p:sp>
-            <p:nvSpPr>
-              <p:cNvPr id="9" name="Rectangle 8">
+          <p:pic>
+            <p:nvPicPr>
+              <p:cNvPr id="123" name="Picture 122">
                 <a:extLst>
                   <a:ext uri="{FF2B5EF4-FFF2-40B4-BE49-F238E27FC236}">
-                    <a16:creationId xmlns:a16="http://schemas.microsoft.com/office/drawing/2014/main" id="{453A783F-41F7-39C9-6B4F-9F52025C9097}"/>
+                    <a16:creationId xmlns:a16="http://schemas.microsoft.com/office/drawing/2014/main" id="{54361CC6-C7B6-7DDD-959E-2FDDF451803C}"/>
                   </a:ext>
                 </a:extLst>
               </p:cNvPr>
-              <p:cNvSpPr/>
+              <p:cNvPicPr>
+                <a:picLocks noChangeAspect="1"/>
+              </p:cNvPicPr>
+              <p:nvPr/>
+            </p:nvPicPr>
+            <p:blipFill>
+              <a:blip r:embed="rId6"/>
+              <a:stretch>
+                <a:fillRect/>
+              </a:stretch>
+            </p:blipFill>
+            <p:spPr>
+              <a:xfrm>
+                <a:off x="7530612" y="380542"/>
+                <a:ext cx="3168647" cy="1637058"/>
+              </a:xfrm>
+              <a:prstGeom prst="rect">
+                <a:avLst/>
+              </a:prstGeom>
+              <a:grpFill/>
+              <a:ln>
+                <a:solidFill>
+                  <a:schemeClr val="accent1">
+                    <a:lumMod val="40000"/>
+                    <a:lumOff val="60000"/>
+                  </a:schemeClr>
+                </a:solidFill>
+              </a:ln>
+            </p:spPr>
+          </p:pic>
+          <p:sp>
+            <p:nvSpPr>
+              <p:cNvPr id="125" name="TextBox 124">
+                <a:extLst>
+                  <a:ext uri="{FF2B5EF4-FFF2-40B4-BE49-F238E27FC236}">
+                    <a16:creationId xmlns:a16="http://schemas.microsoft.com/office/drawing/2014/main" id="{3B4DE68B-5288-4443-8A72-E9C43A4EC4A4}"/>
+                  </a:ext>
+                </a:extLst>
+              </p:cNvPr>
+              <p:cNvSpPr txBox="1"/>
               <p:nvPr/>
             </p:nvSpPr>
             <p:spPr>
               <a:xfrm>
-                <a:off x="19059963" y="19480319"/>
-                <a:ext cx="11237475" cy="1931881"/>
+                <a:off x="7510228" y="2012078"/>
+                <a:ext cx="3009901" cy="208075"/>
               </a:xfrm>
               <a:prstGeom prst="rect">
                 <a:avLst/>
               </a:prstGeom>
-              <a:gradFill>
-                <a:gsLst>
-                  <a:gs pos="16000">
-                    <a:srgbClr val="005AAA"/>
-                  </a:gs>
-                  <a:gs pos="33000">
-                    <a:srgbClr val="F2DF90"/>
-                  </a:gs>
-                  <a:gs pos="47000">
-                    <a:srgbClr val="D93325"/>
-                  </a:gs>
-                  <a:gs pos="79000">
-                    <a:srgbClr val="005AAA"/>
-                  </a:gs>
-                  <a:gs pos="59000">
-                    <a:srgbClr val="F2DF90"/>
-                  </a:gs>
-                </a:gsLst>
-                <a:lin ang="5400000" scaled="0"/>
-              </a:gradFill>
+              <a:grpFill/>
               <a:ln>
                 <a:noFill/>
               </a:ln>
             </p:spPr>
-            <p:style>
-              <a:lnRef idx="2">
-                <a:schemeClr val="accent1">
-                  <a:shade val="15000"/>
-                </a:schemeClr>
-              </a:lnRef>
-              <a:fillRef idx="1">
-                <a:schemeClr val="accent1"/>
-              </a:fillRef>
-              <a:effectRef idx="0">
-                <a:schemeClr val="accent1"/>
-              </a:effectRef>
-              <a:fontRef idx="minor">
-                <a:schemeClr val="lt1"/>
-              </a:fontRef>
-            </p:style>
             <p:txBody>
-              <a:bodyPr rtlCol="0" anchor="ctr"/>
+              <a:bodyPr wrap="square" rtlCol="0">
+                <a:spAutoFit/>
+              </a:bodyPr>
               <a:lstStyle/>
               <a:p>
-                <a:pPr algn="ctr"/>
-                <a:endParaRPr lang="en-GB"/>
+                <a:r>
+                  <a:rPr lang="en-GB" sz="2400" dirty="0">
+                    <a:solidFill>
+                      <a:schemeClr val="bg1"/>
+                    </a:solidFill>
+                  </a:rPr>
+                  <a:t>- CSBS 2019-2025 (Phishing attacks)</a:t>
+                </a:r>
               </a:p>
             </p:txBody>
           </p:sp>
-          <p:pic>
-            <p:nvPicPr>
-              <p:cNvPr id="1026" name="Picture 2" descr="University of Plymouth Logo - PNG Logo Vector Brand Downloads (SVG, EPS)">
-                <a:extLst>
-                  <a:ext uri="{FF2B5EF4-FFF2-40B4-BE49-F238E27FC236}">
-                    <a16:creationId xmlns:a16="http://schemas.microsoft.com/office/drawing/2014/main" id="{6C669D39-B892-CFD8-C26C-C5F8131A8411}"/>
-                  </a:ext>
-                </a:extLst>
-              </p:cNvPr>
-              <p:cNvPicPr>
-                <a:picLocks noChangeAspect="1" noChangeArrowheads="1"/>
-              </p:cNvPicPr>
-              <p:nvPr/>
-            </p:nvPicPr>
-            <p:blipFill>
-              <a:blip r:embed="rId10">
-                <a:extLst>
-                  <a:ext uri="{28A0092B-C50C-407E-A947-70E740481C1C}">
-                    <a14:useLocalDpi xmlns:a14="http://schemas.microsoft.com/office/drawing/2010/main" val="0"/>
-                  </a:ext>
-                </a:extLst>
-              </a:blip>
-              <a:srcRect/>
-              <a:stretch>
-                <a:fillRect/>
-              </a:stretch>
-            </p:blipFill>
-            <p:spPr bwMode="auto">
-              <a:xfrm>
-                <a:off x="19061609" y="18287833"/>
-                <a:ext cx="6906963" cy="4316852"/>
-              </a:xfrm>
-              <a:prstGeom prst="rect">
-                <a:avLst/>
-              </a:prstGeom>
-              <a:noFill/>
-              <a:extLst>
-                <a:ext uri="{909E8E84-426E-40DD-AFC4-6F175D3DCCD1}">
-                  <a14:hiddenFill xmlns:a14="http://schemas.microsoft.com/office/drawing/2010/main">
-                    <a:solidFill>
-                      <a:srgbClr val="FFFFFF"/>
-                    </a:solidFill>
-                  </a14:hiddenFill>
-                </a:ext>
-              </a:extLst>
-            </p:spPr>
-          </p:pic>
         </p:grpSp>
-        <p:sp>
-          <p:nvSpPr>
-            <p:cNvPr id="16" name="TextBox 15">
-              <a:extLst>
-                <a:ext uri="{FF2B5EF4-FFF2-40B4-BE49-F238E27FC236}">
-                  <a16:creationId xmlns:a16="http://schemas.microsoft.com/office/drawing/2014/main" id="{5C1544AC-126C-1484-84D0-DE839048E8FA}"/>
-                </a:ext>
-              </a:extLst>
-            </p:cNvPr>
-            <p:cNvSpPr txBox="1"/>
-            <p:nvPr/>
-          </p:nvSpPr>
-          <p:spPr>
-            <a:xfrm>
-              <a:off x="25968572" y="20047848"/>
-              <a:ext cx="5233789" cy="707886"/>
-            </a:xfrm>
-            <a:prstGeom prst="rect">
-              <a:avLst/>
-            </a:prstGeom>
+      </p:grpSp>
+      <p:sp>
+        <p:nvSpPr>
+          <p:cNvPr id="1024" name="Rectangle 1023">
+            <a:extLst>
+              <a:ext uri="{FF2B5EF4-FFF2-40B4-BE49-F238E27FC236}">
+                <a16:creationId xmlns:a16="http://schemas.microsoft.com/office/drawing/2014/main" id="{E75A96B6-F054-56E7-D8EE-5276A7700385}"/>
+              </a:ext>
+            </a:extLst>
+          </p:cNvPr>
+          <p:cNvSpPr/>
+          <p:nvPr/>
+        </p:nvSpPr>
+        <p:spPr>
+          <a:xfrm>
+            <a:off x="20798699" y="6447827"/>
+            <a:ext cx="2701600" cy="1502140"/>
+          </a:xfrm>
+          <a:prstGeom prst="rect">
+            <a:avLst/>
+          </a:prstGeom>
+          <a:noFill/>
+          <a:ln>
+            <a:solidFill>
+              <a:srgbClr val="FF0000"/>
+            </a:solidFill>
+          </a:ln>
+        </p:spPr>
+        <p:style>
+          <a:lnRef idx="2">
+            <a:schemeClr val="accent1">
+              <a:shade val="15000"/>
+            </a:schemeClr>
+          </a:lnRef>
+          <a:fillRef idx="1">
+            <a:schemeClr val="accent1"/>
+          </a:fillRef>
+          <a:effectRef idx="0">
+            <a:schemeClr val="accent1"/>
+          </a:effectRef>
+          <a:fontRef idx="minor">
+            <a:schemeClr val="lt1"/>
+          </a:fontRef>
+        </p:style>
+        <p:txBody>
+          <a:bodyPr rtlCol="0" anchor="ctr"/>
+          <a:lstStyle/>
+          <a:p>
+            <a:pPr algn="ctr"/>
+            <a:r>
+              <a:rPr lang="en-GB" sz="3200" dirty="0">
+                <a:solidFill>
+                  <a:schemeClr val="tx1"/>
+                </a:solidFill>
+              </a:rPr>
+              <a:t>Most Targeted</a:t>
+            </a:r>
+          </a:p>
+          <a:p>
+            <a:pPr algn="ctr"/>
+            <a:r>
+              <a:rPr lang="en-GB" sz="3200" dirty="0">
+                <a:solidFill>
+                  <a:schemeClr val="tx1"/>
+                </a:solidFill>
+              </a:rPr>
+              <a:t>Ages 21-35</a:t>
+            </a:r>
+          </a:p>
+        </p:txBody>
+      </p:sp>
+      <p:pic>
+        <p:nvPicPr>
+          <p:cNvPr id="1028" name="Picture 4" descr="Target PNG transparent image download, size: 576x576px">
+            <a:extLst>
+              <a:ext uri="{FF2B5EF4-FFF2-40B4-BE49-F238E27FC236}">
+                <a16:creationId xmlns:a16="http://schemas.microsoft.com/office/drawing/2014/main" id="{50401D76-0120-227F-41A0-7F5BA66DA55B}"/>
+              </a:ext>
+            </a:extLst>
+          </p:cNvPr>
+          <p:cNvPicPr>
+            <a:picLocks noChangeAspect="1" noChangeArrowheads="1"/>
+          </p:cNvPicPr>
+          <p:nvPr/>
+        </p:nvPicPr>
+        <p:blipFill>
+          <a:blip r:embed="rId7">
+            <a:alphaModFix amt="46000"/>
+            <a:extLst>
+              <a:ext uri="{28A0092B-C50C-407E-A947-70E740481C1C}">
+                <a14:useLocalDpi xmlns:a14="http://schemas.microsoft.com/office/drawing/2010/main" val="0"/>
+              </a:ext>
+            </a:extLst>
+          </a:blip>
+          <a:srcRect/>
+          <a:stretch>
+            <a:fillRect/>
+          </a:stretch>
+        </p:blipFill>
+        <p:spPr bwMode="auto">
+          <a:xfrm>
+            <a:off x="21056966" y="6003466"/>
+            <a:ext cx="2302643" cy="2302643"/>
+          </a:xfrm>
+          <a:prstGeom prst="rect">
+            <a:avLst/>
+          </a:prstGeom>
+          <a:noFill/>
+          <a:effectLst>
+            <a:outerShdw blurRad="50800" dist="50800" dir="5400000" algn="ctr" rotWithShape="0">
+              <a:srgbClr val="000000">
+                <a:alpha val="0"/>
+              </a:srgbClr>
+            </a:outerShdw>
+          </a:effectLst>
+          <a:extLst>
+            <a:ext uri="{909E8E84-426E-40DD-AFC4-6F175D3DCCD1}">
+              <a14:hiddenFill xmlns:a14="http://schemas.microsoft.com/office/drawing/2010/main">
+                <a:solidFill>
+                  <a:srgbClr val="FFFFFF"/>
+                </a:solidFill>
+              </a14:hiddenFill>
+            </a:ext>
+          </a:extLst>
+        </p:spPr>
+      </p:pic>
+      <p:sp>
+        <p:nvSpPr>
+          <p:cNvPr id="1027" name="Rectangle 1026">
+            <a:extLst>
+              <a:ext uri="{FF2B5EF4-FFF2-40B4-BE49-F238E27FC236}">
+                <a16:creationId xmlns:a16="http://schemas.microsoft.com/office/drawing/2014/main" id="{021A4DB6-F017-B5ED-3703-2D9B3B1F0F17}"/>
+              </a:ext>
+            </a:extLst>
+          </p:cNvPr>
+          <p:cNvSpPr/>
+          <p:nvPr/>
+        </p:nvSpPr>
+        <p:spPr>
+          <a:xfrm>
+            <a:off x="23881509" y="6391192"/>
+            <a:ext cx="2701599" cy="1591370"/>
+          </a:xfrm>
+          <a:prstGeom prst="rect">
+            <a:avLst/>
+          </a:prstGeom>
+          <a:noFill/>
+          <a:ln>
+            <a:solidFill>
+              <a:srgbClr val="FFFF00"/>
+            </a:solidFill>
+          </a:ln>
+        </p:spPr>
+        <p:style>
+          <a:lnRef idx="2">
+            <a:schemeClr val="accent1">
+              <a:shade val="15000"/>
+            </a:schemeClr>
+          </a:lnRef>
+          <a:fillRef idx="1">
+            <a:schemeClr val="accent1"/>
+          </a:fillRef>
+          <a:effectRef idx="0">
+            <a:schemeClr val="accent1"/>
+          </a:effectRef>
+          <a:fontRef idx="minor">
+            <a:schemeClr val="lt1"/>
+          </a:fontRef>
+        </p:style>
+        <p:txBody>
+          <a:bodyPr rtlCol="0" anchor="ctr"/>
+          <a:lstStyle/>
+          <a:p>
+            <a:pPr algn="ctr"/>
+            <a:r>
+              <a:rPr lang="en-GB" sz="3200" dirty="0">
+                <a:solidFill>
+                  <a:schemeClr val="tx1"/>
+                </a:solidFill>
+              </a:rPr>
+              <a:t>Most Gullible</a:t>
+            </a:r>
+          </a:p>
+          <a:p>
+            <a:pPr algn="ctr"/>
+            <a:r>
+              <a:rPr lang="en-GB" sz="3200" dirty="0">
+                <a:solidFill>
+                  <a:schemeClr val="tx1"/>
+                </a:solidFill>
+              </a:rPr>
+              <a:t>Ages 35-49</a:t>
+            </a:r>
+          </a:p>
+        </p:txBody>
+      </p:sp>
+      <p:pic>
+        <p:nvPicPr>
+          <p:cNvPr id="1030" name="Picture 6" descr="Free Phishing Attack Icon - Download SVG, PNG for Crime &amp; Security |  IconScout">
+            <a:extLst>
+              <a:ext uri="{FF2B5EF4-FFF2-40B4-BE49-F238E27FC236}">
+                <a16:creationId xmlns:a16="http://schemas.microsoft.com/office/drawing/2014/main" id="{01462B03-6E38-B30C-535F-74D3971AC8E4}"/>
+              </a:ext>
+            </a:extLst>
+          </p:cNvPr>
+          <p:cNvPicPr>
+            <a:picLocks noChangeAspect="1" noChangeArrowheads="1"/>
+          </p:cNvPicPr>
+          <p:nvPr/>
+        </p:nvPicPr>
+        <p:blipFill>
+          <a:blip r:embed="rId8">
+            <a:alphaModFix amt="40000"/>
+            <a:extLst>
+              <a:ext uri="{28A0092B-C50C-407E-A947-70E740481C1C}">
+                <a14:useLocalDpi xmlns:a14="http://schemas.microsoft.com/office/drawing/2010/main" val="0"/>
+              </a:ext>
+            </a:extLst>
+          </a:blip>
+          <a:srcRect/>
+          <a:stretch>
+            <a:fillRect/>
+          </a:stretch>
+        </p:blipFill>
+        <p:spPr bwMode="auto">
+          <a:xfrm>
+            <a:off x="24116277" y="6183090"/>
+            <a:ext cx="1909698" cy="1909698"/>
+          </a:xfrm>
+          <a:prstGeom prst="rect">
+            <a:avLst/>
+          </a:prstGeom>
+          <a:noFill/>
+          <a:extLst>
+            <a:ext uri="{909E8E84-426E-40DD-AFC4-6F175D3DCCD1}">
+              <a14:hiddenFill xmlns:a14="http://schemas.microsoft.com/office/drawing/2010/main">
+                <a:solidFill>
+                  <a:srgbClr val="FFFFFF"/>
+                </a:solidFill>
+              </a14:hiddenFill>
+            </a:ext>
+          </a:extLst>
+        </p:spPr>
+      </p:pic>
+      <p:sp>
+        <p:nvSpPr>
+          <p:cNvPr id="1029" name="Rectangle 1028">
+            <a:extLst>
+              <a:ext uri="{FF2B5EF4-FFF2-40B4-BE49-F238E27FC236}">
+                <a16:creationId xmlns:a16="http://schemas.microsoft.com/office/drawing/2014/main" id="{71738483-8CAA-1A99-C318-39B8CC162B0E}"/>
+              </a:ext>
+            </a:extLst>
+          </p:cNvPr>
+          <p:cNvSpPr/>
+          <p:nvPr/>
+        </p:nvSpPr>
+        <p:spPr>
+          <a:xfrm>
+            <a:off x="26951096" y="6420004"/>
+            <a:ext cx="2764545" cy="1591370"/>
+          </a:xfrm>
+          <a:prstGeom prst="rect">
+            <a:avLst/>
+          </a:prstGeom>
+          <a:noFill/>
+          <a:ln>
+            <a:solidFill>
+              <a:schemeClr val="accent6">
+                <a:lumMod val="40000"/>
+                <a:lumOff val="60000"/>
+              </a:schemeClr>
+            </a:solidFill>
+          </a:ln>
+        </p:spPr>
+        <p:style>
+          <a:lnRef idx="2">
+            <a:schemeClr val="accent1">
+              <a:shade val="15000"/>
+            </a:schemeClr>
+          </a:lnRef>
+          <a:fillRef idx="1">
+            <a:schemeClr val="accent1"/>
+          </a:fillRef>
+          <a:effectRef idx="0">
+            <a:schemeClr val="accent1"/>
+          </a:effectRef>
+          <a:fontRef idx="minor">
+            <a:schemeClr val="lt1"/>
+          </a:fontRef>
+        </p:style>
+        <p:txBody>
+          <a:bodyPr rtlCol="0" anchor="ctr"/>
+          <a:lstStyle/>
+          <a:p>
+            <a:pPr algn="ctr"/>
+            <a:r>
+              <a:rPr lang="en-GB" sz="3200" dirty="0">
+                <a:solidFill>
+                  <a:schemeClr val="tx1"/>
+                </a:solidFill>
+              </a:rPr>
+              <a:t>Most Financial Losses</a:t>
+            </a:r>
+          </a:p>
+          <a:p>
+            <a:pPr algn="ctr"/>
+            <a:r>
+              <a:rPr lang="en-GB" sz="3200" dirty="0">
+                <a:solidFill>
+                  <a:schemeClr val="tx1"/>
+                </a:solidFill>
+              </a:rPr>
+              <a:t>Ages 75+</a:t>
+            </a:r>
+          </a:p>
+        </p:txBody>
+      </p:sp>
+      <p:pic>
+        <p:nvPicPr>
+          <p:cNvPr id="1032" name="Picture 8" descr="Money bag with hole 35774809 PNG">
+            <a:extLst>
+              <a:ext uri="{FF2B5EF4-FFF2-40B4-BE49-F238E27FC236}">
+                <a16:creationId xmlns:a16="http://schemas.microsoft.com/office/drawing/2014/main" id="{36A55BC7-ADAD-C034-5D3C-2F902F24FC9B}"/>
+              </a:ext>
+            </a:extLst>
+          </p:cNvPr>
+          <p:cNvPicPr>
+            <a:picLocks noChangeAspect="1" noChangeArrowheads="1"/>
+          </p:cNvPicPr>
+          <p:nvPr/>
+        </p:nvPicPr>
+        <p:blipFill rotWithShape="1">
+          <a:blip r:embed="rId9">
+            <a:alphaModFix amt="36000"/>
+            <a:extLst>
+              <a:ext uri="{28A0092B-C50C-407E-A947-70E740481C1C}">
+                <a14:useLocalDpi xmlns:a14="http://schemas.microsoft.com/office/drawing/2010/main" val="0"/>
+              </a:ext>
+            </a:extLst>
+          </a:blip>
+          <a:srcRect b="30716"/>
+          <a:stretch>
+            <a:fillRect/>
+          </a:stretch>
+        </p:blipFill>
+        <p:spPr bwMode="auto">
+          <a:xfrm>
+            <a:off x="27279211" y="6322226"/>
+            <a:ext cx="2108314" cy="2103899"/>
+          </a:xfrm>
+          <a:prstGeom prst="rect">
+            <a:avLst/>
+          </a:prstGeom>
+          <a:noFill/>
+          <a:extLst>
+            <a:ext uri="{909E8E84-426E-40DD-AFC4-6F175D3DCCD1}">
+              <a14:hiddenFill xmlns:a14="http://schemas.microsoft.com/office/drawing/2010/main">
+                <a:solidFill>
+                  <a:srgbClr val="FFFFFF"/>
+                </a:solidFill>
+              </a14:hiddenFill>
+            </a:ext>
+          </a:extLst>
+        </p:spPr>
+      </p:pic>
+      <p:sp>
+        <p:nvSpPr>
+          <p:cNvPr id="1036" name="Rectangle 1035">
+            <a:extLst>
+              <a:ext uri="{FF2B5EF4-FFF2-40B4-BE49-F238E27FC236}">
+                <a16:creationId xmlns:a16="http://schemas.microsoft.com/office/drawing/2014/main" id="{8577361A-E43E-2D25-A0C1-CB77FA47B13A}"/>
+              </a:ext>
+            </a:extLst>
+          </p:cNvPr>
+          <p:cNvSpPr/>
+          <p:nvPr/>
+        </p:nvSpPr>
+        <p:spPr>
+          <a:xfrm>
+            <a:off x="20739611" y="8295242"/>
+            <a:ext cx="8976030" cy="540713"/>
+          </a:xfrm>
+          <a:prstGeom prst="rect">
+            <a:avLst/>
+          </a:prstGeom>
+          <a:solidFill>
+            <a:srgbClr val="78206E"/>
+          </a:solidFill>
+        </p:spPr>
+        <p:style>
+          <a:lnRef idx="2">
+            <a:schemeClr val="accent1">
+              <a:shade val="15000"/>
+            </a:schemeClr>
+          </a:lnRef>
+          <a:fillRef idx="1">
+            <a:schemeClr val="accent1"/>
+          </a:fillRef>
+          <a:effectRef idx="0">
+            <a:schemeClr val="accent1"/>
+          </a:effectRef>
+          <a:fontRef idx="minor">
+            <a:schemeClr val="lt1"/>
+          </a:fontRef>
+        </p:style>
+        <p:txBody>
+          <a:bodyPr rtlCol="0" anchor="ctr"/>
+          <a:lstStyle/>
+          <a:p>
+            <a:pPr algn="ctr"/>
+            <a:r>
+              <a:rPr lang="en-GB" sz="2400" dirty="0"/>
+              <a:t>Data from LexisNexis.co.uk &amp; Ons.gov.uk</a:t>
+            </a:r>
+          </a:p>
+        </p:txBody>
+      </p:sp>
+      <p:sp>
+        <p:nvSpPr>
+          <p:cNvPr id="6" name="Rectangle 5">
+            <a:extLst>
+              <a:ext uri="{FF2B5EF4-FFF2-40B4-BE49-F238E27FC236}">
+                <a16:creationId xmlns:a16="http://schemas.microsoft.com/office/drawing/2014/main" id="{075F6BDE-AB73-715A-8CAA-05E59A82C86B}"/>
+              </a:ext>
+            </a:extLst>
+          </p:cNvPr>
+          <p:cNvSpPr/>
+          <p:nvPr/>
+        </p:nvSpPr>
+        <p:spPr>
+          <a:xfrm>
+            <a:off x="20769834" y="1710307"/>
+            <a:ext cx="8945807" cy="7143676"/>
+          </a:xfrm>
+          <a:prstGeom prst="rect">
+            <a:avLst/>
+          </a:prstGeom>
+          <a:noFill/>
+          <a:ln>
+            <a:solidFill>
+              <a:srgbClr val="FF0000"/>
+            </a:solidFill>
+          </a:ln>
+        </p:spPr>
+        <p:style>
+          <a:lnRef idx="2">
+            <a:schemeClr val="accent1">
+              <a:shade val="15000"/>
+            </a:schemeClr>
+          </a:lnRef>
+          <a:fillRef idx="1">
+            <a:schemeClr val="accent1"/>
+          </a:fillRef>
+          <a:effectRef idx="0">
+            <a:schemeClr val="accent1"/>
+          </a:effectRef>
+          <a:fontRef idx="minor">
+            <a:schemeClr val="lt1"/>
+          </a:fontRef>
+        </p:style>
+        <p:txBody>
+          <a:bodyPr rtlCol="0" anchor="ctr"/>
+          <a:lstStyle/>
+          <a:p>
+            <a:pPr algn="ctr"/>
+            <a:endParaRPr lang="en-GB"/>
+          </a:p>
+        </p:txBody>
+      </p:sp>
+      <p:sp>
+        <p:nvSpPr>
+          <p:cNvPr id="9" name="Rectangle 8">
+            <a:extLst>
+              <a:ext uri="{FF2B5EF4-FFF2-40B4-BE49-F238E27FC236}">
+                <a16:creationId xmlns:a16="http://schemas.microsoft.com/office/drawing/2014/main" id="{453A783F-41F7-39C9-6B4F-9F52025C9097}"/>
+              </a:ext>
+            </a:extLst>
+          </p:cNvPr>
+          <p:cNvSpPr/>
+          <p:nvPr/>
+        </p:nvSpPr>
+        <p:spPr>
+          <a:xfrm>
+            <a:off x="19059963" y="19480319"/>
+            <a:ext cx="11237475" cy="1931881"/>
+          </a:xfrm>
+          <a:prstGeom prst="rect">
+            <a:avLst/>
+          </a:prstGeom>
+          <a:solidFill>
+            <a:schemeClr val="bg1"/>
+          </a:solidFill>
+          <a:ln>
             <a:noFill/>
-          </p:spPr>
-          <p:txBody>
-            <a:bodyPr wrap="square" rtlCol="0">
-              <a:spAutoFit/>
-            </a:bodyPr>
-            <a:lstStyle/>
-            <a:p>
-              <a:r>
-                <a:rPr lang="en-GB" sz="4000" dirty="0"/>
-                <a:t>Nikodem Drabik</a:t>
-              </a:r>
-            </a:p>
-          </p:txBody>
-        </p:sp>
-      </p:grpSp>
+          </a:ln>
+        </p:spPr>
+        <p:style>
+          <a:lnRef idx="2">
+            <a:schemeClr val="accent1">
+              <a:shade val="15000"/>
+            </a:schemeClr>
+          </a:lnRef>
+          <a:fillRef idx="1">
+            <a:schemeClr val="accent1"/>
+          </a:fillRef>
+          <a:effectRef idx="0">
+            <a:schemeClr val="accent1"/>
+          </a:effectRef>
+          <a:fontRef idx="minor">
+            <a:schemeClr val="lt1"/>
+          </a:fontRef>
+        </p:style>
+        <p:txBody>
+          <a:bodyPr rtlCol="0" anchor="ctr"/>
+          <a:lstStyle/>
+          <a:p>
+            <a:pPr algn="ctr"/>
+            <a:endParaRPr lang="en-GB"/>
+          </a:p>
+        </p:txBody>
+      </p:sp>
+      <p:pic>
+        <p:nvPicPr>
+          <p:cNvPr id="1026" name="Picture 2" descr="University of Plymouth Logo - PNG Logo Vector Brand Downloads (SVG, EPS)">
+            <a:extLst>
+              <a:ext uri="{FF2B5EF4-FFF2-40B4-BE49-F238E27FC236}">
+                <a16:creationId xmlns:a16="http://schemas.microsoft.com/office/drawing/2014/main" id="{6C669D39-B892-CFD8-C26C-C5F8131A8411}"/>
+              </a:ext>
+            </a:extLst>
+          </p:cNvPr>
+          <p:cNvPicPr>
+            <a:picLocks noChangeAspect="1" noChangeArrowheads="1"/>
+          </p:cNvPicPr>
+          <p:nvPr/>
+        </p:nvPicPr>
+        <p:blipFill>
+          <a:blip r:embed="rId10">
+            <a:extLst>
+              <a:ext uri="{28A0092B-C50C-407E-A947-70E740481C1C}">
+                <a14:useLocalDpi xmlns:a14="http://schemas.microsoft.com/office/drawing/2010/main" val="0"/>
+              </a:ext>
+            </a:extLst>
+          </a:blip>
+          <a:srcRect/>
+          <a:stretch>
+            <a:fillRect/>
+          </a:stretch>
+        </p:blipFill>
+        <p:spPr bwMode="auto">
+          <a:xfrm>
+            <a:off x="19061609" y="18287833"/>
+            <a:ext cx="6906963" cy="4316852"/>
+          </a:xfrm>
+          <a:prstGeom prst="rect">
+            <a:avLst/>
+          </a:prstGeom>
+          <a:noFill/>
+          <a:extLst>
+            <a:ext uri="{909E8E84-426E-40DD-AFC4-6F175D3DCCD1}">
+              <a14:hiddenFill xmlns:a14="http://schemas.microsoft.com/office/drawing/2010/main">
+                <a:solidFill>
+                  <a:srgbClr val="FFFFFF"/>
+                </a:solidFill>
+              </a14:hiddenFill>
+            </a:ext>
+          </a:extLst>
+        </p:spPr>
+      </p:pic>
+      <p:sp>
+        <p:nvSpPr>
+          <p:cNvPr id="16" name="TextBox 15">
+            <a:extLst>
+              <a:ext uri="{FF2B5EF4-FFF2-40B4-BE49-F238E27FC236}">
+                <a16:creationId xmlns:a16="http://schemas.microsoft.com/office/drawing/2014/main" id="{5C1544AC-126C-1484-84D0-DE839048E8FA}"/>
+              </a:ext>
+            </a:extLst>
+          </p:cNvPr>
+          <p:cNvSpPr txBox="1"/>
+          <p:nvPr/>
+        </p:nvSpPr>
+        <p:spPr>
+          <a:xfrm>
+            <a:off x="25968572" y="20047848"/>
+            <a:ext cx="5233789" cy="707886"/>
+          </a:xfrm>
+          <a:prstGeom prst="rect">
+            <a:avLst/>
+          </a:prstGeom>
+          <a:noFill/>
+        </p:spPr>
+        <p:txBody>
+          <a:bodyPr wrap="square" rtlCol="0">
+            <a:spAutoFit/>
+          </a:bodyPr>
+          <a:lstStyle/>
+          <a:p>
+            <a:r>
+              <a:rPr lang="en-GB" sz="4000" dirty="0"/>
+              <a:t>Nikodem Drabik</a:t>
+            </a:r>
+          </a:p>
+        </p:txBody>
+      </p:sp>
       <p:sp>
         <p:nvSpPr>
           <p:cNvPr id="18" name="Rectangle 17">
@@ -7768,6 +7637,9 @@
           <a:prstGeom prst="rect">
             <a:avLst/>
           </a:prstGeom>
+          <a:solidFill>
+            <a:srgbClr val="0070C0"/>
+          </a:solidFill>
         </p:spPr>
         <p:style>
           <a:lnRef idx="2">
@@ -7811,7 +7683,7 @@
         </p:nvSpPr>
         <p:spPr>
           <a:xfrm>
-            <a:off x="15486466" y="9715984"/>
+            <a:off x="15486466" y="13848372"/>
             <a:ext cx="9221526" cy="5346510"/>
           </a:xfrm>
           <a:prstGeom prst="rect">
@@ -7860,14 +7732,14 @@
         </p:nvSpPr>
         <p:spPr>
           <a:xfrm>
-            <a:off x="15913016" y="11229520"/>
+            <a:off x="15913016" y="15361908"/>
             <a:ext cx="5546808" cy="1933448"/>
           </a:xfrm>
           <a:prstGeom prst="rect">
             <a:avLst/>
           </a:prstGeom>
           <a:solidFill>
-            <a:srgbClr val="00B0F0"/>
+            <a:srgbClr val="0070C0"/>
           </a:solidFill>
         </p:spPr>
         <p:style>
@@ -7909,7 +7781,7 @@
         </p:nvSpPr>
         <p:spPr>
           <a:xfrm>
-            <a:off x="19019995" y="11626865"/>
+            <a:off x="19019995" y="15759253"/>
             <a:ext cx="2161990" cy="1159577"/>
           </a:xfrm>
           <a:prstGeom prst="rect">
@@ -7958,7 +7830,7 @@
         </p:nvSpPr>
         <p:spPr>
           <a:xfrm>
-            <a:off x="16302845" y="11635896"/>
+            <a:off x="16302845" y="15768284"/>
             <a:ext cx="2151102" cy="1159577"/>
           </a:xfrm>
           <a:prstGeom prst="rect">
@@ -8007,7 +7879,7 @@
         </p:nvSpPr>
         <p:spPr>
           <a:xfrm>
-            <a:off x="21705970" y="10480153"/>
+            <a:off x="21705970" y="14612541"/>
             <a:ext cx="2890998" cy="4312523"/>
           </a:xfrm>
           <a:prstGeom prst="rect">
@@ -8053,7 +7925,7 @@
         </p:nvSpPr>
         <p:spPr>
           <a:xfrm>
-            <a:off x="21763120" y="10567989"/>
+            <a:off x="21763120" y="14700377"/>
             <a:ext cx="2777992" cy="1302278"/>
           </a:xfrm>
           <a:prstGeom prst="rect">
@@ -8102,7 +7974,7 @@
         </p:nvSpPr>
         <p:spPr>
           <a:xfrm>
-            <a:off x="21780201" y="11991309"/>
+            <a:off x="21780201" y="16123697"/>
             <a:ext cx="2777992" cy="1302278"/>
           </a:xfrm>
           <a:prstGeom prst="rect">
@@ -8160,7 +8032,7 @@
         </p:nvSpPr>
         <p:spPr>
           <a:xfrm>
-            <a:off x="21763120" y="13404673"/>
+            <a:off x="21763120" y="17537061"/>
             <a:ext cx="2777992" cy="1302278"/>
           </a:xfrm>
           <a:prstGeom prst="rect">
@@ -8210,7 +8082,7 @@
         </p:nvSpPr>
         <p:spPr>
           <a:xfrm>
-            <a:off x="17126726" y="10348655"/>
+            <a:off x="17126726" y="14481043"/>
             <a:ext cx="2670361" cy="646331"/>
           </a:xfrm>
           <a:prstGeom prst="rect">
@@ -8249,7 +8121,7 @@
         </p:nvSpPr>
         <p:spPr>
           <a:xfrm>
-            <a:off x="21929999" y="9810851"/>
+            <a:off x="21929999" y="13943239"/>
             <a:ext cx="2777992" cy="646331"/>
           </a:xfrm>
           <a:prstGeom prst="rect">
@@ -8288,7 +8160,7 @@
         </p:nvSpPr>
         <p:spPr>
           <a:xfrm>
-            <a:off x="25195270" y="10003871"/>
+            <a:off x="25195270" y="14136259"/>
             <a:ext cx="4666999" cy="4704165"/>
           </a:xfrm>
           <a:prstGeom prst="rect">
@@ -8395,15 +8267,20 @@
         </p:nvSpPr>
         <p:spPr>
           <a:xfrm>
-            <a:off x="15647863" y="15672243"/>
-            <a:ext cx="6602928" cy="3385813"/>
+            <a:off x="23281644" y="9822069"/>
+            <a:ext cx="6602928" cy="3642955"/>
           </a:xfrm>
           <a:prstGeom prst="rect">
             <a:avLst/>
           </a:prstGeom>
           <a:solidFill>
-            <a:srgbClr val="104862"/>
+            <a:srgbClr val="00B050"/>
           </a:solidFill>
+          <a:ln>
+            <a:solidFill>
+              <a:schemeClr val="tx1"/>
+            </a:solidFill>
+          </a:ln>
         </p:spPr>
         <p:style>
           <a:lnRef idx="2">
@@ -8509,15 +8386,20 @@
         </p:nvSpPr>
         <p:spPr>
           <a:xfrm>
-            <a:off x="23398617" y="15417738"/>
-            <a:ext cx="6602928" cy="3758689"/>
+            <a:off x="15486466" y="9813895"/>
+            <a:ext cx="7253036" cy="3682307"/>
           </a:xfrm>
           <a:prstGeom prst="rect">
             <a:avLst/>
           </a:prstGeom>
           <a:solidFill>
-            <a:srgbClr val="104862"/>
+            <a:srgbClr val="78206E"/>
           </a:solidFill>
+          <a:ln>
+            <a:solidFill>
+              <a:srgbClr val="FF0000"/>
+            </a:solidFill>
+          </a:ln>
         </p:spPr>
         <p:style>
           <a:lnRef idx="2">
@@ -8603,7 +8485,7 @@
         </p:nvCxnSpPr>
         <p:spPr>
           <a:xfrm flipH="1" flipV="1">
-            <a:off x="18173700" y="12183475"/>
+            <a:off x="18173700" y="16315863"/>
             <a:ext cx="846295" cy="23179"/>
           </a:xfrm>
           <a:prstGeom prst="straightConnector1">
@@ -8645,7 +8527,7 @@
         </p:nvCxnSpPr>
         <p:spPr>
           <a:xfrm flipV="1">
-            <a:off x="20100990" y="11219128"/>
+            <a:off x="20100990" y="15351516"/>
             <a:ext cx="1662130" cy="407737"/>
           </a:xfrm>
           <a:prstGeom prst="straightConnector1">
@@ -8688,7 +8570,7 @@
         </p:nvCxnSpPr>
         <p:spPr>
           <a:xfrm>
-            <a:off x="21181985" y="12206654"/>
+            <a:off x="21181985" y="16339042"/>
             <a:ext cx="598216" cy="435794"/>
           </a:xfrm>
           <a:prstGeom prst="straightConnector1">
@@ -8731,7 +8613,7 @@
         </p:nvCxnSpPr>
         <p:spPr>
           <a:xfrm>
-            <a:off x="20100990" y="12786442"/>
+            <a:off x="20100990" y="16918830"/>
             <a:ext cx="1662130" cy="1269370"/>
           </a:xfrm>
           <a:prstGeom prst="straightConnector1">
@@ -8771,8 +8653,8 @@
         </p:nvSpPr>
         <p:spPr>
           <a:xfrm>
-            <a:off x="9960097" y="15710225"/>
-            <a:ext cx="4411719" cy="3730114"/>
+            <a:off x="10073220" y="17574375"/>
+            <a:ext cx="4411719" cy="3176466"/>
           </a:xfrm>
           <a:prstGeom prst="rect">
             <a:avLst/>
@@ -8953,6 +8835,164 @@
           </a:extLst>
         </p:spPr>
       </p:pic>
+      <p:pic>
+        <p:nvPicPr>
+          <p:cNvPr id="10" name="Picture 9">
+            <a:extLst>
+              <a:ext uri="{FF2B5EF4-FFF2-40B4-BE49-F238E27FC236}">
+                <a16:creationId xmlns:a16="http://schemas.microsoft.com/office/drawing/2014/main" id="{21460833-AAEB-C3E6-F5ED-84EB465CC2DD}"/>
+              </a:ext>
+            </a:extLst>
+          </p:cNvPr>
+          <p:cNvPicPr>
+            <a:picLocks noChangeAspect="1"/>
+          </p:cNvPicPr>
+          <p:nvPr/>
+        </p:nvPicPr>
+        <p:blipFill>
+          <a:blip r:embed="rId13"/>
+          <a:stretch>
+            <a:fillRect/>
+          </a:stretch>
+        </p:blipFill>
+        <p:spPr>
+          <a:xfrm>
+            <a:off x="7616701" y="14384932"/>
+            <a:ext cx="3560189" cy="3055127"/>
+          </a:xfrm>
+          <a:prstGeom prst="rect">
+            <a:avLst/>
+          </a:prstGeom>
+          <a:ln>
+            <a:solidFill>
+              <a:srgbClr val="FF0000"/>
+            </a:solidFill>
+            <a:prstDash val="dash"/>
+          </a:ln>
+        </p:spPr>
+      </p:pic>
+      <p:sp>
+        <p:nvSpPr>
+          <p:cNvPr id="36" name="TextBox 35">
+            <a:extLst>
+              <a:ext uri="{FF2B5EF4-FFF2-40B4-BE49-F238E27FC236}">
+                <a16:creationId xmlns:a16="http://schemas.microsoft.com/office/drawing/2014/main" id="{73A21594-551E-14FC-BB39-5A44BABFB9C1}"/>
+              </a:ext>
+            </a:extLst>
+          </p:cNvPr>
+          <p:cNvSpPr txBox="1"/>
+          <p:nvPr/>
+        </p:nvSpPr>
+        <p:spPr>
+          <a:xfrm>
+            <a:off x="11570448" y="14397468"/>
+            <a:ext cx="2352666" cy="2246769"/>
+          </a:xfrm>
+          <a:prstGeom prst="rect">
+            <a:avLst/>
+          </a:prstGeom>
+          <a:noFill/>
+          <a:ln>
+            <a:solidFill>
+              <a:srgbClr val="FF0000"/>
+            </a:solidFill>
+            <a:prstDash val="dash"/>
+          </a:ln>
+        </p:spPr>
+        <p:txBody>
+          <a:bodyPr wrap="square">
+            <a:spAutoFit/>
+          </a:bodyPr>
+          <a:lstStyle/>
+          <a:p>
+            <a:r>
+              <a:rPr lang="en-GB" sz="2000" dirty="0">
+                <a:solidFill>
+                  <a:schemeClr val="bg1"/>
+                </a:solidFill>
+              </a:rPr>
+              <a:t>Customisable User Interface Settings</a:t>
+            </a:r>
+          </a:p>
+          <a:p>
+            <a:endParaRPr lang="en-GB" sz="2000" dirty="0">
+              <a:solidFill>
+                <a:schemeClr val="bg1"/>
+              </a:solidFill>
+            </a:endParaRPr>
+          </a:p>
+          <a:p>
+            <a:r>
+              <a:rPr lang="en-GB" sz="2000" dirty="0">
+                <a:solidFill>
+                  <a:schemeClr val="bg1"/>
+                </a:solidFill>
+              </a:rPr>
+              <a:t>Users with visual impermeant can customise their </a:t>
+            </a:r>
+            <a:r>
+              <a:rPr lang="en-GB" sz="2000" dirty="0" err="1">
+                <a:solidFill>
+                  <a:schemeClr val="bg1"/>
+                </a:solidFill>
+              </a:rPr>
+              <a:t>inviroment</a:t>
+            </a:r>
+            <a:endParaRPr lang="en-GB" dirty="0">
+              <a:solidFill>
+                <a:schemeClr val="bg1"/>
+              </a:solidFill>
+            </a:endParaRPr>
+          </a:p>
+        </p:txBody>
+      </p:sp>
+      <p:cxnSp>
+        <p:nvCxnSpPr>
+          <p:cNvPr id="40" name="Straight Arrow Connector 39">
+            <a:extLst>
+              <a:ext uri="{FF2B5EF4-FFF2-40B4-BE49-F238E27FC236}">
+                <a16:creationId xmlns:a16="http://schemas.microsoft.com/office/drawing/2014/main" id="{2A2B5910-141A-27A6-4D04-A9EF638AFC26}"/>
+              </a:ext>
+            </a:extLst>
+          </p:cNvPr>
+          <p:cNvCxnSpPr>
+            <a:cxnSpLocks/>
+            <a:stCxn id="10" idx="3"/>
+            <a:endCxn id="36" idx="1"/>
+          </p:cNvCxnSpPr>
+          <p:nvPr/>
+        </p:nvCxnSpPr>
+        <p:spPr>
+          <a:xfrm flipV="1">
+            <a:off x="11176890" y="15520853"/>
+            <a:ext cx="393558" cy="391643"/>
+          </a:xfrm>
+          <a:prstGeom prst="straightConnector1">
+            <a:avLst/>
+          </a:prstGeom>
+          <a:ln>
+            <a:solidFill>
+              <a:srgbClr val="FF0000"/>
+            </a:solidFill>
+            <a:prstDash val="dash"/>
+            <a:tailEnd type="triangle"/>
+          </a:ln>
+        </p:spPr>
+        <p:style>
+          <a:lnRef idx="2">
+            <a:schemeClr val="accent1"/>
+          </a:lnRef>
+          <a:fillRef idx="0">
+            <a:schemeClr val="accent1"/>
+          </a:fillRef>
+          <a:effectRef idx="1">
+            <a:schemeClr val="accent1"/>
+          </a:effectRef>
+          <a:fontRef idx="minor">
+            <a:schemeClr val="tx1"/>
+          </a:fontRef>
+        </p:style>
+      </p:cxnSp>
     </p:spTree>
     <p:extLst>
       <p:ext uri="{BB962C8B-B14F-4D97-AF65-F5344CB8AC3E}">
